--- a/presentation/RIGOR_result5_judges.pptx
+++ b/presentation/RIGOR_result5_judges.pptx
@@ -1785,7 +1785,7 @@
                 <a:cs typeface="Calibri"/>
                 <a:sym typeface="Calibri"/>
               </a:rPr>
-              <a:t>[11:07–12:03]  SPOKEN SCRIPT (91 words)</a:t>
+              <a:t>[11:07–12:00]  SPOKEN SCRIPT (86 words)</a:t>
             </a:r>
           </a:p>
           <a:p>
@@ -1799,7 +1799,7 @@
                 <a:cs typeface="Calibri"/>
                 <a:sym typeface="Calibri"/>
               </a:rPr>
-              <a:t>Automatic checks agree. Do evaluators agree? For each table, an LLM judge and ten ontology experts saw the schema, five competency questions, the questions the ontology must answer, and four anonymized ontologies. They scored each on seven quality dimensions and ranked them. The LLM judge put RIGOR first on every table, in all three databases. [pause] The experts put RIGOR first in seven of ten rankings, with the highest average score on both databases. [pause] Direct mapping gives structure without meaning. LLMs alone give meaning without structure. RIGOR gives both, and checks them.</a:t>
+              <a:t>Automatic checks agree. Do evaluators agree? For each table, an LLM judge and ten ontology experts saw the schema, five competency questions, the questions the ontology must answer, and four anonymized ontologies. They scored each on seven quality dimensions and ranked them first to fourth. The LLM judge ranked RIGOR first every time. [pause] The experts ranked RIGOR first seventy percent of the time, with the highest average score. [pause] Direct mapping gives structure without meaning. LLMs alone give meaning without structure. RIGOR gives both, and checks them.</a:t>
             </a:r>
           </a:p>
           <a:p/>
@@ -1856,7 +1856,7 @@
                 <a:cs typeface="Calibri"/>
                 <a:sym typeface="Calibri"/>
               </a:rPr>
-              <a:t>IF RUNNING LATE, DROP: "with the highest average score on both databases"</a:t>
+              <a:t>IF RUNNING LATE, DROP: "with the highest average score"</a:t>
             </a:r>
           </a:p>
           <a:p/>
@@ -4169,17 +4169,7 @@
                 <a:latin typeface="Calibri"/>
                 <a:cs typeface="Calibri"/>
               </a:rPr>
-              <a:t xml:space="preserve">First on every table</a:t>
-            </a:r>
-            <a:r>
-              <a:rPr lang="en-US" sz="1500" b="0" i="0" dirty="0">
-                <a:solidFill>
-                  <a:srgbClr val="3A434C"/>
-                </a:solidFill>
-                <a:latin typeface="Calibri"/>
-                <a:cs typeface="Calibri"/>
-              </a:rPr>
-              <a:t xml:space="preserve">, in all three databases</a:t>
+              <a:t xml:space="preserve">Ranked RIGOR first every time</a:t>
             </a:r>
           </a:p>
         </p:txBody>
@@ -5057,7 +5047,7 @@
                 <a:latin typeface="Calibri"/>
                 <a:cs typeface="Calibri"/>
               </a:rPr>
-              <a:t xml:space="preserve">First in 7 of 10 rankings</a:t>
+              <a:t xml:space="preserve">Ranked RIGOR first 70% of the time</a:t>
             </a:r>
           </a:p>
         </p:txBody>
@@ -5711,7 +5701,7 @@
                 <a:latin typeface="Calibri"/>
                 <a:cs typeface="Calibri"/>
               </a:rPr>
-              <a:t xml:space="preserve">Average scores (0–5) per database. Judge: all 58 tables, ontologies generated with Claude. Experts: 4 medical tables, significant agreement (Kendall's W). Paper Sec. 4.6, Tables 1, 10–12.</a:t>
+              <a:t xml:space="preserve">Average scores (0–5) per database. Judge: ontologies generated with Claude. Experts: significant agreement (Kendall's W). Paper Sec. 4.6, Tables 1, 10–12.</a:t>
             </a:r>
           </a:p>
         </p:txBody>
